--- a/montmorillonite_decaf/patent_figures.pptx
+++ b/montmorillonite_decaf/patent_figures.pptx
@@ -136,6 +136,21 @@
               </c:strCache>
             </c:strRef>
           </c:tx>
+          <c:spPr>
+            <a:pattFill prst="wdUpDiag">
+              <a:fgClr>
+                <a:srgbClr val="000000"/>
+              </a:fgClr>
+              <a:bgClr>
+                <a:srgbClr val="FFFFFF"/>
+              </a:bgClr>
+            </a:pattFill>
+            <a:ln>
+              <a:solidFill>
+                <a:srgbClr val="000000"/>
+              </a:solidFill>
+            </a:ln>
+          </c:spPr>
           <c:cat>
             <c:strRef>
               <c:f>Sheet1!$A$2:$A$7</c:f>
@@ -204,6 +219,21 @@
               </c:strCache>
             </c:strRef>
           </c:tx>
+          <c:spPr>
+            <a:pattFill prst="pct25">
+              <a:fgClr>
+                <a:srgbClr val="000000"/>
+              </a:fgClr>
+              <a:bgClr>
+                <a:srgbClr val="FFFFFF"/>
+              </a:bgClr>
+            </a:pattFill>
+            <a:ln>
+              <a:solidFill>
+                <a:srgbClr val="000000"/>
+              </a:solidFill>
+            </a:ln>
+          </c:spPr>
           <c:cat>
             <c:strRef>
               <c:f>Sheet1!$A$2:$A$7</c:f>
@@ -347,6 +377,27 @@
               </c:strCache>
             </c:strRef>
           </c:tx>
+          <c:spPr>
+            <a:ln w="25400">
+              <a:solidFill>
+                <a:srgbClr val="000000"/>
+              </a:solidFill>
+            </a:ln>
+          </c:spPr>
+          <c:marker>
+            <c:symbol val="circle"/>
+            <c:size val="7"/>
+            <c:spPr>
+              <a:solidFill>
+                <a:srgbClr val="FFFFFF"/>
+              </a:solidFill>
+              <a:ln>
+                <a:solidFill>
+                  <a:srgbClr val="000000"/>
+                </a:solidFill>
+              </a:ln>
+            </c:spPr>
+          </c:marker>
           <c:cat>
             <c:strRef>
               <c:f>Sheet1!$A$2:$A$7</c:f>
@@ -480,6 +531,27 @@
               </c:strCache>
             </c:strRef>
           </c:tx>
+          <c:spPr>
+            <a:ln w="25400">
+              <a:solidFill>
+                <a:srgbClr val="000000"/>
+              </a:solidFill>
+            </a:ln>
+          </c:spPr>
+          <c:marker>
+            <c:symbol val="circle"/>
+            <c:size val="7"/>
+            <c:spPr>
+              <a:solidFill>
+                <a:srgbClr val="FFFFFF"/>
+              </a:solidFill>
+              <a:ln>
+                <a:solidFill>
+                  <a:srgbClr val="000000"/>
+                </a:solidFill>
+              </a:ln>
+            </c:spPr>
+          </c:marker>
           <c:cat>
             <c:strRef>
               <c:f>Sheet1!$A$2:$A$8</c:f>
@@ -555,6 +627,28 @@
               </c:strCache>
             </c:strRef>
           </c:tx>
+          <c:spPr>
+            <a:ln w="22225">
+              <a:solidFill>
+                <a:srgbClr val="000000"/>
+              </a:solidFill>
+              <a:prstDash val="dash"/>
+            </a:ln>
+          </c:spPr>
+          <c:marker>
+            <c:symbol val="square"/>
+            <c:size val="7"/>
+            <c:spPr>
+              <a:solidFill>
+                <a:srgbClr val="FFFFFF"/>
+              </a:solidFill>
+              <a:ln>
+                <a:solidFill>
+                  <a:srgbClr val="000000"/>
+                </a:solidFill>
+              </a:ln>
+            </c:spPr>
+          </c:marker>
           <c:cat>
             <c:strRef>
               <c:f>Sheet1!$A$2:$A$8</c:f>
@@ -714,6 +808,20 @@
               <a:noFill/>
             </a:ln>
           </c:spPr>
+          <c:marker>
+            <c:symbol val="circle"/>
+            <c:size val="9"/>
+            <c:spPr>
+              <a:solidFill>
+                <a:srgbClr val="000000"/>
+              </a:solidFill>
+              <a:ln>
+                <a:solidFill>
+                  <a:srgbClr val="000000"/>
+                </a:solidFill>
+              </a:ln>
+            </c:spPr>
+          </c:marker>
           <c:xVal>
             <c:numRef>
               <c:f>Sheet1!$A$2:$A$5</c:f>
@@ -5351,9 +5459,14 @@
           <a:prstGeom prst="rect">
             <a:avLst/>
           </a:prstGeom>
-          <a:solidFill>
-            <a:srgbClr val="D9D9D9"/>
-          </a:solidFill>
+          <a:pattFill prst="pct20">
+            <a:fgClr>
+              <a:srgbClr val="000000"/>
+            </a:fgClr>
+            <a:bgClr>
+              <a:srgbClr val="FFFFFF"/>
+            </a:bgClr>
+          </a:pattFill>
           <a:ln w="19050">
             <a:solidFill>
               <a:srgbClr val="000000"/>
@@ -5432,9 +5545,14 @@
           <a:prstGeom prst="rect">
             <a:avLst/>
           </a:prstGeom>
-          <a:solidFill>
-            <a:srgbClr val="D9D9D9"/>
-          </a:solidFill>
+          <a:pattFill prst="pct20">
+            <a:fgClr>
+              <a:srgbClr val="000000"/>
+            </a:fgClr>
+            <a:bgClr>
+              <a:srgbClr val="FFFFFF"/>
+            </a:bgClr>
+          </a:pattFill>
           <a:ln w="19050">
             <a:solidFill>
               <a:srgbClr val="000000"/>
@@ -5513,9 +5631,14 @@
           <a:prstGeom prst="rect">
             <a:avLst/>
           </a:prstGeom>
-          <a:solidFill>
-            <a:srgbClr val="D9D9D9"/>
-          </a:solidFill>
+          <a:pattFill prst="pct20">
+            <a:fgClr>
+              <a:srgbClr val="000000"/>
+            </a:fgClr>
+            <a:bgClr>
+              <a:srgbClr val="FFFFFF"/>
+            </a:bgClr>
+          </a:pattFill>
           <a:ln w="19050">
             <a:solidFill>
               <a:srgbClr val="000000"/>
